--- a/Munim_Round1_Track3_v3.pptx
+++ b/Munim_Round1_Track3_v3.pptx
@@ -12753,7 +12753,7 @@
                 <a:latin typeface="Segoe UI"/>
                 <a:cs typeface="Segoe UI"/>
               </a:rPr>
-              <a:t xml:space="preserve">The money maths is plain code. The AI only explains, and a local Gemma model keeps it running without paid APIs.</a:t>
+              <a:t xml:space="preserve">The money maths is plain code. AI is only used to explain and chat, through Sarvam, with a local Gemma model as backup if Sarvam is down.</a:t>
             </a:r>
           </a:p>
         </p:txBody>
